--- a/img/models/models.pptx
+++ b/img/models/models.pptx
@@ -254,7 +254,7 @@
           <a:p>
             <a:fld id="{19729664-E51F-9D43-AC1D-89266E3D84E7}" type="datetimeFigureOut">
               <a:rPr lang="en-US" smtClean="0"/>
-              <a:t>2/27/26</a:t>
+              <a:t>3/2/26</a:t>
             </a:fld>
             <a:endParaRPr lang="en-US"/>
           </a:p>
@@ -424,7 +424,7 @@
           <a:p>
             <a:fld id="{19729664-E51F-9D43-AC1D-89266E3D84E7}" type="datetimeFigureOut">
               <a:rPr lang="en-US" smtClean="0"/>
-              <a:t>2/27/26</a:t>
+              <a:t>3/2/26</a:t>
             </a:fld>
             <a:endParaRPr lang="en-US"/>
           </a:p>
@@ -604,7 +604,7 @@
           <a:p>
             <a:fld id="{19729664-E51F-9D43-AC1D-89266E3D84E7}" type="datetimeFigureOut">
               <a:rPr lang="en-US" smtClean="0"/>
-              <a:t>2/27/26</a:t>
+              <a:t>3/2/26</a:t>
             </a:fld>
             <a:endParaRPr lang="en-US"/>
           </a:p>
@@ -774,7 +774,7 @@
           <a:p>
             <a:fld id="{19729664-E51F-9D43-AC1D-89266E3D84E7}" type="datetimeFigureOut">
               <a:rPr lang="en-US" smtClean="0"/>
-              <a:t>2/27/26</a:t>
+              <a:t>3/2/26</a:t>
             </a:fld>
             <a:endParaRPr lang="en-US"/>
           </a:p>
@@ -1020,7 +1020,7 @@
           <a:p>
             <a:fld id="{19729664-E51F-9D43-AC1D-89266E3D84E7}" type="datetimeFigureOut">
               <a:rPr lang="en-US" smtClean="0"/>
-              <a:t>2/27/26</a:t>
+              <a:t>3/2/26</a:t>
             </a:fld>
             <a:endParaRPr lang="en-US"/>
           </a:p>
@@ -1252,7 +1252,7 @@
           <a:p>
             <a:fld id="{19729664-E51F-9D43-AC1D-89266E3D84E7}" type="datetimeFigureOut">
               <a:rPr lang="en-US" smtClean="0"/>
-              <a:t>2/27/26</a:t>
+              <a:t>3/2/26</a:t>
             </a:fld>
             <a:endParaRPr lang="en-US"/>
           </a:p>
@@ -1619,7 +1619,7 @@
           <a:p>
             <a:fld id="{19729664-E51F-9D43-AC1D-89266E3D84E7}" type="datetimeFigureOut">
               <a:rPr lang="en-US" smtClean="0"/>
-              <a:t>2/27/26</a:t>
+              <a:t>3/2/26</a:t>
             </a:fld>
             <a:endParaRPr lang="en-US"/>
           </a:p>
@@ -1737,7 +1737,7 @@
           <a:p>
             <a:fld id="{19729664-E51F-9D43-AC1D-89266E3D84E7}" type="datetimeFigureOut">
               <a:rPr lang="en-US" smtClean="0"/>
-              <a:t>2/27/26</a:t>
+              <a:t>3/2/26</a:t>
             </a:fld>
             <a:endParaRPr lang="en-US"/>
           </a:p>
@@ -1832,7 +1832,7 @@
           <a:p>
             <a:fld id="{19729664-E51F-9D43-AC1D-89266E3D84E7}" type="datetimeFigureOut">
               <a:rPr lang="en-US" smtClean="0"/>
-              <a:t>2/27/26</a:t>
+              <a:t>3/2/26</a:t>
             </a:fld>
             <a:endParaRPr lang="en-US"/>
           </a:p>
@@ -2109,7 +2109,7 @@
           <a:p>
             <a:fld id="{19729664-E51F-9D43-AC1D-89266E3D84E7}" type="datetimeFigureOut">
               <a:rPr lang="en-US" smtClean="0"/>
-              <a:t>2/27/26</a:t>
+              <a:t>3/2/26</a:t>
             </a:fld>
             <a:endParaRPr lang="en-US"/>
           </a:p>
@@ -2366,7 +2366,7 @@
           <a:p>
             <a:fld id="{19729664-E51F-9D43-AC1D-89266E3D84E7}" type="datetimeFigureOut">
               <a:rPr lang="en-US" smtClean="0"/>
-              <a:t>2/27/26</a:t>
+              <a:t>3/2/26</a:t>
             </a:fld>
             <a:endParaRPr lang="en-US"/>
           </a:p>
@@ -2579,7 +2579,7 @@
           <a:p>
             <a:fld id="{19729664-E51F-9D43-AC1D-89266E3D84E7}" type="datetimeFigureOut">
               <a:rPr lang="en-US" smtClean="0"/>
-              <a:t>2/27/26</a:t>
+              <a:t>3/2/26</a:t>
             </a:fld>
             <a:endParaRPr lang="en-US"/>
           </a:p>

--- a/img/models/models.pptx
+++ b/img/models/models.pptx
@@ -254,7 +254,7 @@
           <a:p>
             <a:fld id="{19729664-E51F-9D43-AC1D-89266E3D84E7}" type="datetimeFigureOut">
               <a:rPr lang="en-US" smtClean="0"/>
-              <a:t>3/2/26</a:t>
+              <a:t>3/3/26</a:t>
             </a:fld>
             <a:endParaRPr lang="en-US"/>
           </a:p>
@@ -424,7 +424,7 @@
           <a:p>
             <a:fld id="{19729664-E51F-9D43-AC1D-89266E3D84E7}" type="datetimeFigureOut">
               <a:rPr lang="en-US" smtClean="0"/>
-              <a:t>3/2/26</a:t>
+              <a:t>3/3/26</a:t>
             </a:fld>
             <a:endParaRPr lang="en-US"/>
           </a:p>
@@ -604,7 +604,7 @@
           <a:p>
             <a:fld id="{19729664-E51F-9D43-AC1D-89266E3D84E7}" type="datetimeFigureOut">
               <a:rPr lang="en-US" smtClean="0"/>
-              <a:t>3/2/26</a:t>
+              <a:t>3/3/26</a:t>
             </a:fld>
             <a:endParaRPr lang="en-US"/>
           </a:p>
@@ -774,7 +774,7 @@
           <a:p>
             <a:fld id="{19729664-E51F-9D43-AC1D-89266E3D84E7}" type="datetimeFigureOut">
               <a:rPr lang="en-US" smtClean="0"/>
-              <a:t>3/2/26</a:t>
+              <a:t>3/3/26</a:t>
             </a:fld>
             <a:endParaRPr lang="en-US"/>
           </a:p>
@@ -1020,7 +1020,7 @@
           <a:p>
             <a:fld id="{19729664-E51F-9D43-AC1D-89266E3D84E7}" type="datetimeFigureOut">
               <a:rPr lang="en-US" smtClean="0"/>
-              <a:t>3/2/26</a:t>
+              <a:t>3/3/26</a:t>
             </a:fld>
             <a:endParaRPr lang="en-US"/>
           </a:p>
@@ -1252,7 +1252,7 @@
           <a:p>
             <a:fld id="{19729664-E51F-9D43-AC1D-89266E3D84E7}" type="datetimeFigureOut">
               <a:rPr lang="en-US" smtClean="0"/>
-              <a:t>3/2/26</a:t>
+              <a:t>3/3/26</a:t>
             </a:fld>
             <a:endParaRPr lang="en-US"/>
           </a:p>
@@ -1619,7 +1619,7 @@
           <a:p>
             <a:fld id="{19729664-E51F-9D43-AC1D-89266E3D84E7}" type="datetimeFigureOut">
               <a:rPr lang="en-US" smtClean="0"/>
-              <a:t>3/2/26</a:t>
+              <a:t>3/3/26</a:t>
             </a:fld>
             <a:endParaRPr lang="en-US"/>
           </a:p>
@@ -1737,7 +1737,7 @@
           <a:p>
             <a:fld id="{19729664-E51F-9D43-AC1D-89266E3D84E7}" type="datetimeFigureOut">
               <a:rPr lang="en-US" smtClean="0"/>
-              <a:t>3/2/26</a:t>
+              <a:t>3/3/26</a:t>
             </a:fld>
             <a:endParaRPr lang="en-US"/>
           </a:p>
@@ -1832,7 +1832,7 @@
           <a:p>
             <a:fld id="{19729664-E51F-9D43-AC1D-89266E3D84E7}" type="datetimeFigureOut">
               <a:rPr lang="en-US" smtClean="0"/>
-              <a:t>3/2/26</a:t>
+              <a:t>3/3/26</a:t>
             </a:fld>
             <a:endParaRPr lang="en-US"/>
           </a:p>
@@ -2109,7 +2109,7 @@
           <a:p>
             <a:fld id="{19729664-E51F-9D43-AC1D-89266E3D84E7}" type="datetimeFigureOut">
               <a:rPr lang="en-US" smtClean="0"/>
-              <a:t>3/2/26</a:t>
+              <a:t>3/3/26</a:t>
             </a:fld>
             <a:endParaRPr lang="en-US"/>
           </a:p>
@@ -2366,7 +2366,7 @@
           <a:p>
             <a:fld id="{19729664-E51F-9D43-AC1D-89266E3D84E7}" type="datetimeFigureOut">
               <a:rPr lang="en-US" smtClean="0"/>
-              <a:t>3/2/26</a:t>
+              <a:t>3/3/26</a:t>
             </a:fld>
             <a:endParaRPr lang="en-US"/>
           </a:p>
@@ -2579,7 +2579,7 @@
           <a:p>
             <a:fld id="{19729664-E51F-9D43-AC1D-89266E3D84E7}" type="datetimeFigureOut">
               <a:rPr lang="en-US" smtClean="0"/>
-              <a:t>3/2/26</a:t>
+              <a:t>3/3/26</a:t>
             </a:fld>
             <a:endParaRPr lang="en-US"/>
           </a:p>

--- a/img/models/models.pptx
+++ b/img/models/models.pptx
@@ -254,7 +254,7 @@
           <a:p>
             <a:fld id="{19729664-E51F-9D43-AC1D-89266E3D84E7}" type="datetimeFigureOut">
               <a:rPr lang="en-US" smtClean="0"/>
-              <a:t>3/3/26</a:t>
+              <a:t>3/12/26</a:t>
             </a:fld>
             <a:endParaRPr lang="en-US"/>
           </a:p>
@@ -424,7 +424,7 @@
           <a:p>
             <a:fld id="{19729664-E51F-9D43-AC1D-89266E3D84E7}" type="datetimeFigureOut">
               <a:rPr lang="en-US" smtClean="0"/>
-              <a:t>3/3/26</a:t>
+              <a:t>3/12/26</a:t>
             </a:fld>
             <a:endParaRPr lang="en-US"/>
           </a:p>
@@ -604,7 +604,7 @@
           <a:p>
             <a:fld id="{19729664-E51F-9D43-AC1D-89266E3D84E7}" type="datetimeFigureOut">
               <a:rPr lang="en-US" smtClean="0"/>
-              <a:t>3/3/26</a:t>
+              <a:t>3/12/26</a:t>
             </a:fld>
             <a:endParaRPr lang="en-US"/>
           </a:p>
@@ -774,7 +774,7 @@
           <a:p>
             <a:fld id="{19729664-E51F-9D43-AC1D-89266E3D84E7}" type="datetimeFigureOut">
               <a:rPr lang="en-US" smtClean="0"/>
-              <a:t>3/3/26</a:t>
+              <a:t>3/12/26</a:t>
             </a:fld>
             <a:endParaRPr lang="en-US"/>
           </a:p>
@@ -1020,7 +1020,7 @@
           <a:p>
             <a:fld id="{19729664-E51F-9D43-AC1D-89266E3D84E7}" type="datetimeFigureOut">
               <a:rPr lang="en-US" smtClean="0"/>
-              <a:t>3/3/26</a:t>
+              <a:t>3/12/26</a:t>
             </a:fld>
             <a:endParaRPr lang="en-US"/>
           </a:p>
@@ -1252,7 +1252,7 @@
           <a:p>
             <a:fld id="{19729664-E51F-9D43-AC1D-89266E3D84E7}" type="datetimeFigureOut">
               <a:rPr lang="en-US" smtClean="0"/>
-              <a:t>3/3/26</a:t>
+              <a:t>3/12/26</a:t>
             </a:fld>
             <a:endParaRPr lang="en-US"/>
           </a:p>
@@ -1619,7 +1619,7 @@
           <a:p>
             <a:fld id="{19729664-E51F-9D43-AC1D-89266E3D84E7}" type="datetimeFigureOut">
               <a:rPr lang="en-US" smtClean="0"/>
-              <a:t>3/3/26</a:t>
+              <a:t>3/12/26</a:t>
             </a:fld>
             <a:endParaRPr lang="en-US"/>
           </a:p>
@@ -1737,7 +1737,7 @@
           <a:p>
             <a:fld id="{19729664-E51F-9D43-AC1D-89266E3D84E7}" type="datetimeFigureOut">
               <a:rPr lang="en-US" smtClean="0"/>
-              <a:t>3/3/26</a:t>
+              <a:t>3/12/26</a:t>
             </a:fld>
             <a:endParaRPr lang="en-US"/>
           </a:p>
@@ -1832,7 +1832,7 @@
           <a:p>
             <a:fld id="{19729664-E51F-9D43-AC1D-89266E3D84E7}" type="datetimeFigureOut">
               <a:rPr lang="en-US" smtClean="0"/>
-              <a:t>3/3/26</a:t>
+              <a:t>3/12/26</a:t>
             </a:fld>
             <a:endParaRPr lang="en-US"/>
           </a:p>
@@ -2109,7 +2109,7 @@
           <a:p>
             <a:fld id="{19729664-E51F-9D43-AC1D-89266E3D84E7}" type="datetimeFigureOut">
               <a:rPr lang="en-US" smtClean="0"/>
-              <a:t>3/3/26</a:t>
+              <a:t>3/12/26</a:t>
             </a:fld>
             <a:endParaRPr lang="en-US"/>
           </a:p>
@@ -2366,7 +2366,7 @@
           <a:p>
             <a:fld id="{19729664-E51F-9D43-AC1D-89266E3D84E7}" type="datetimeFigureOut">
               <a:rPr lang="en-US" smtClean="0"/>
-              <a:t>3/3/26</a:t>
+              <a:t>3/12/26</a:t>
             </a:fld>
             <a:endParaRPr lang="en-US"/>
           </a:p>
@@ -2579,7 +2579,7 @@
           <a:p>
             <a:fld id="{19729664-E51F-9D43-AC1D-89266E3D84E7}" type="datetimeFigureOut">
               <a:rPr lang="en-US" smtClean="0"/>
-              <a:t>3/3/26</a:t>
+              <a:t>3/12/26</a:t>
             </a:fld>
             <a:endParaRPr lang="en-US"/>
           </a:p>
@@ -3152,10 +3152,10 @@
           <p:nvPr/>
         </p:nvPicPr>
         <p:blipFill>
-          <a:blip r:embed="rId2">
+          <a:blip>
             <a:extLst>
               <a:ext uri="{96DAC541-7B7A-43D3-8B79-37D633B846F1}">
-                <asvg:svgBlip xmlns:asvg="http://schemas.microsoft.com/office/drawing/2016/SVG/main" r:embed="rId3"/>
+                <asvg:svgBlip xmlns:asvg="http://schemas.microsoft.com/office/drawing/2016/SVG/main" r:embed="rId2"/>
               </a:ext>
             </a:extLst>
           </a:blip>
@@ -3276,10 +3276,10 @@
           <p:nvPr/>
         </p:nvPicPr>
         <p:blipFill>
-          <a:blip r:embed="rId4">
+          <a:blip>
             <a:extLst>
               <a:ext uri="{96DAC541-7B7A-43D3-8B79-37D633B846F1}">
-                <asvg:svgBlip xmlns:asvg="http://schemas.microsoft.com/office/drawing/2016/SVG/main" r:embed="rId5"/>
+                <asvg:svgBlip xmlns:asvg="http://schemas.microsoft.com/office/drawing/2016/SVG/main" r:embed="rId3"/>
               </a:ext>
             </a:extLst>
           </a:blip>
@@ -3399,10 +3399,10 @@
           <p:nvPr/>
         </p:nvPicPr>
         <p:blipFill>
-          <a:blip r:embed="rId2">
+          <a:blip>
             <a:extLst>
               <a:ext uri="{96DAC541-7B7A-43D3-8B79-37D633B846F1}">
-                <asvg:svgBlip xmlns:asvg="http://schemas.microsoft.com/office/drawing/2016/SVG/main" r:embed="rId3"/>
+                <asvg:svgBlip xmlns:asvg="http://schemas.microsoft.com/office/drawing/2016/SVG/main" r:embed="rId2"/>
               </a:ext>
             </a:extLst>
           </a:blip>
@@ -3523,10 +3523,10 @@
           <p:nvPr/>
         </p:nvPicPr>
         <p:blipFill>
-          <a:blip r:embed="rId6">
+          <a:blip>
             <a:extLst>
               <a:ext uri="{96DAC541-7B7A-43D3-8B79-37D633B846F1}">
-                <asvg:svgBlip xmlns:asvg="http://schemas.microsoft.com/office/drawing/2016/SVG/main" r:embed="rId7"/>
+                <asvg:svgBlip xmlns:asvg="http://schemas.microsoft.com/office/drawing/2016/SVG/main" r:embed="rId4"/>
               </a:ext>
             </a:extLst>
           </a:blip>
@@ -3873,10 +3873,10 @@
           <p:nvPr/>
         </p:nvPicPr>
         <p:blipFill>
-          <a:blip r:embed="rId4">
+          <a:blip>
             <a:extLst>
               <a:ext uri="{96DAC541-7B7A-43D3-8B79-37D633B846F1}">
-                <asvg:svgBlip xmlns:asvg="http://schemas.microsoft.com/office/drawing/2016/SVG/main" r:embed="rId8"/>
+                <asvg:svgBlip xmlns:asvg="http://schemas.microsoft.com/office/drawing/2016/SVG/main" r:embed="rId5"/>
               </a:ext>
             </a:extLst>
           </a:blip>
@@ -3908,7 +3908,7 @@
         </p:nvSpPr>
         <p:spPr>
           <a:xfrm>
-            <a:off x="982247" y="3448026"/>
+            <a:off x="982247" y="5234322"/>
             <a:ext cx="446678" cy="446678"/>
           </a:xfrm>
           <a:prstGeom prst="ellipse">
@@ -3958,10 +3958,10 @@
           <p:nvPr/>
         </p:nvPicPr>
         <p:blipFill>
-          <a:blip r:embed="rId2">
+          <a:blip>
             <a:extLst>
               <a:ext uri="{96DAC541-7B7A-43D3-8B79-37D633B846F1}">
-                <asvg:svgBlip xmlns:asvg="http://schemas.microsoft.com/office/drawing/2016/SVG/main" r:embed="rId3"/>
+                <asvg:svgBlip xmlns:asvg="http://schemas.microsoft.com/office/drawing/2016/SVG/main" r:embed="rId2"/>
               </a:ext>
             </a:extLst>
           </a:blip>
@@ -3971,7 +3971,7 @@
         </p:blipFill>
         <p:spPr>
           <a:xfrm>
-            <a:off x="1004345" y="3475342"/>
+            <a:off x="1004345" y="5261638"/>
             <a:ext cx="386005" cy="386005"/>
           </a:xfrm>
           <a:prstGeom prst="rect">
@@ -3993,7 +3993,7 @@
         </p:nvSpPr>
         <p:spPr>
           <a:xfrm>
-            <a:off x="855499" y="3879852"/>
+            <a:off x="855499" y="5666148"/>
             <a:ext cx="671979" cy="215444"/>
           </a:xfrm>
           <a:prstGeom prst="rect">
@@ -4031,7 +4031,7 @@
         </p:nvSpPr>
         <p:spPr>
           <a:xfrm>
-            <a:off x="1792382" y="3448026"/>
+            <a:off x="1792382" y="5234322"/>
             <a:ext cx="446678" cy="446678"/>
           </a:xfrm>
           <a:prstGeom prst="ellipse">
@@ -4080,7 +4080,7 @@
         </p:nvSpPr>
         <p:spPr>
           <a:xfrm>
-            <a:off x="1752005" y="3890014"/>
+            <a:off x="1752005" y="5676310"/>
             <a:ext cx="539301" cy="292965"/>
           </a:xfrm>
           <a:prstGeom prst="rect">
@@ -4123,7 +4123,7 @@
         </p:nvSpPr>
         <p:spPr>
           <a:xfrm>
-            <a:off x="2602382" y="3448026"/>
+            <a:off x="2602382" y="5234322"/>
             <a:ext cx="446678" cy="446678"/>
           </a:xfrm>
           <a:prstGeom prst="ellipse">
@@ -4172,7 +4172,7 @@
         </p:nvSpPr>
         <p:spPr>
           <a:xfrm>
-            <a:off x="2418328" y="3890707"/>
+            <a:off x="2418328" y="5677003"/>
             <a:ext cx="809713" cy="292965"/>
           </a:xfrm>
           <a:prstGeom prst="rect">
@@ -4216,10 +4216,10 @@
           <p:nvPr/>
         </p:nvPicPr>
         <p:blipFill>
-          <a:blip r:embed="rId9">
+          <a:blip>
             <a:extLst>
               <a:ext uri="{96DAC541-7B7A-43D3-8B79-37D633B846F1}">
-                <asvg:svgBlip xmlns:asvg="http://schemas.microsoft.com/office/drawing/2016/SVG/main" r:embed="rId10"/>
+                <asvg:svgBlip xmlns:asvg="http://schemas.microsoft.com/office/drawing/2016/SVG/main" r:embed="rId6"/>
               </a:ext>
             </a:extLst>
           </a:blip>
@@ -4252,10 +4252,10 @@
           <p:nvPr/>
         </p:nvPicPr>
         <p:blipFill>
-          <a:blip r:embed="rId11">
+          <a:blip>
             <a:extLst>
               <a:ext uri="{96DAC541-7B7A-43D3-8B79-37D633B846F1}">
-                <asvg:svgBlip xmlns:asvg="http://schemas.microsoft.com/office/drawing/2016/SVG/main" r:embed="rId12"/>
+                <asvg:svgBlip xmlns:asvg="http://schemas.microsoft.com/office/drawing/2016/SVG/main" r:embed="rId7"/>
               </a:ext>
             </a:extLst>
           </a:blip>
@@ -4265,7 +4265,7 @@
         </p:blipFill>
         <p:spPr>
           <a:xfrm>
-            <a:off x="1854176" y="3411874"/>
+            <a:off x="1854176" y="5198170"/>
             <a:ext cx="332954" cy="536396"/>
           </a:xfrm>
           <a:prstGeom prst="rect">
@@ -4287,7 +4287,7 @@
         </p:nvSpPr>
         <p:spPr>
           <a:xfrm>
-            <a:off x="3412800" y="3448026"/>
+            <a:off x="3412800" y="5234322"/>
             <a:ext cx="446678" cy="446678"/>
           </a:xfrm>
           <a:prstGeom prst="ellipse">
@@ -4338,10 +4338,10 @@
           <p:nvPr/>
         </p:nvPicPr>
         <p:blipFill>
-          <a:blip r:embed="rId4">
+          <a:blip>
             <a:extLst>
               <a:ext uri="{96DAC541-7B7A-43D3-8B79-37D633B846F1}">
-                <asvg:svgBlip xmlns:asvg="http://schemas.microsoft.com/office/drawing/2016/SVG/main" r:embed="rId8"/>
+                <asvg:svgBlip xmlns:asvg="http://schemas.microsoft.com/office/drawing/2016/SVG/main" r:embed="rId5"/>
               </a:ext>
             </a:extLst>
           </a:blip>
@@ -4351,7 +4351,7 @@
         </p:blipFill>
         <p:spPr>
           <a:xfrm>
-            <a:off x="3492919" y="3521475"/>
+            <a:off x="3492919" y="5307771"/>
             <a:ext cx="299779" cy="299779"/>
           </a:xfrm>
           <a:prstGeom prst="rect">
@@ -4373,7 +4373,7 @@
         </p:nvSpPr>
         <p:spPr>
           <a:xfrm>
-            <a:off x="3325709" y="3867536"/>
+            <a:off x="3325709" y="5653832"/>
             <a:ext cx="623889" cy="215444"/>
           </a:xfrm>
           <a:prstGeom prst="rect">
@@ -4411,7 +4411,7 @@
         </p:nvSpPr>
         <p:spPr>
           <a:xfrm>
-            <a:off x="982382" y="4339706"/>
+            <a:off x="982382" y="3452538"/>
             <a:ext cx="446678" cy="446678"/>
           </a:xfrm>
           <a:prstGeom prst="ellipse">
@@ -4461,10 +4461,10 @@
           <p:nvPr/>
         </p:nvPicPr>
         <p:blipFill>
-          <a:blip r:embed="rId2">
+          <a:blip>
             <a:extLst>
               <a:ext uri="{96DAC541-7B7A-43D3-8B79-37D633B846F1}">
-                <asvg:svgBlip xmlns:asvg="http://schemas.microsoft.com/office/drawing/2016/SVG/main" r:embed="rId3"/>
+                <asvg:svgBlip xmlns:asvg="http://schemas.microsoft.com/office/drawing/2016/SVG/main" r:embed="rId2"/>
               </a:ext>
             </a:extLst>
           </a:blip>
@@ -4474,7 +4474,7 @@
         </p:blipFill>
         <p:spPr>
           <a:xfrm>
-            <a:off x="1013901" y="4370042"/>
+            <a:off x="1013901" y="3482874"/>
             <a:ext cx="386005" cy="386005"/>
           </a:xfrm>
           <a:prstGeom prst="rect">
@@ -4496,7 +4496,7 @@
         </p:nvSpPr>
         <p:spPr>
           <a:xfrm>
-            <a:off x="862500" y="4770597"/>
+            <a:off x="862500" y="3883429"/>
             <a:ext cx="671979" cy="215444"/>
           </a:xfrm>
           <a:prstGeom prst="rect">
@@ -4534,7 +4534,7 @@
         </p:nvSpPr>
         <p:spPr>
           <a:xfrm>
-            <a:off x="1792382" y="4339706"/>
+            <a:off x="1792382" y="3452538"/>
             <a:ext cx="446678" cy="446678"/>
           </a:xfrm>
           <a:prstGeom prst="ellipse">
@@ -4583,7 +4583,7 @@
         </p:nvSpPr>
         <p:spPr>
           <a:xfrm>
-            <a:off x="1608906" y="4786265"/>
+            <a:off x="1608906" y="3899097"/>
             <a:ext cx="832114" cy="292965"/>
           </a:xfrm>
           <a:prstGeom prst="rect">
@@ -4626,7 +4626,7 @@
         </p:nvSpPr>
         <p:spPr>
           <a:xfrm>
-            <a:off x="2602382" y="4339706"/>
+            <a:off x="2602382" y="3452538"/>
             <a:ext cx="446678" cy="446678"/>
           </a:xfrm>
           <a:prstGeom prst="ellipse">
@@ -4675,7 +4675,7 @@
         </p:nvSpPr>
         <p:spPr>
           <a:xfrm>
-            <a:off x="2276299" y="4784490"/>
+            <a:off x="2276299" y="3897322"/>
             <a:ext cx="1125274" cy="194477"/>
           </a:xfrm>
           <a:prstGeom prst="rect">
@@ -4718,7 +4718,7 @@
         </p:nvSpPr>
         <p:spPr>
           <a:xfrm>
-            <a:off x="3412382" y="4339706"/>
+            <a:off x="3412382" y="3452538"/>
             <a:ext cx="446678" cy="446678"/>
           </a:xfrm>
           <a:prstGeom prst="ellipse">
@@ -4769,10 +4769,10 @@
           <p:nvPr/>
         </p:nvPicPr>
         <p:blipFill>
-          <a:blip r:embed="rId4">
+          <a:blip>
             <a:extLst>
               <a:ext uri="{96DAC541-7B7A-43D3-8B79-37D633B846F1}">
-                <asvg:svgBlip xmlns:asvg="http://schemas.microsoft.com/office/drawing/2016/SVG/main" r:embed="rId8"/>
+                <asvg:svgBlip xmlns:asvg="http://schemas.microsoft.com/office/drawing/2016/SVG/main" r:embed="rId5"/>
               </a:ext>
             </a:extLst>
           </a:blip>
@@ -4782,7 +4782,7 @@
         </p:blipFill>
         <p:spPr>
           <a:xfrm>
-            <a:off x="3494302" y="4417694"/>
+            <a:off x="3494302" y="3530526"/>
             <a:ext cx="299779" cy="299779"/>
           </a:xfrm>
           <a:prstGeom prst="rect">
@@ -4804,7 +4804,7 @@
         </p:nvSpPr>
         <p:spPr>
           <a:xfrm>
-            <a:off x="3323775" y="4759640"/>
+            <a:off x="3323775" y="3872472"/>
             <a:ext cx="623889" cy="215444"/>
           </a:xfrm>
           <a:prstGeom prst="rect">
@@ -4843,10 +4843,10 @@
           <p:nvPr/>
         </p:nvPicPr>
         <p:blipFill>
-          <a:blip r:embed="rId13">
+          <a:blip>
             <a:extLst>
               <a:ext uri="{96DAC541-7B7A-43D3-8B79-37D633B846F1}">
-                <asvg:svgBlip xmlns:asvg="http://schemas.microsoft.com/office/drawing/2016/SVG/main" r:embed="rId14"/>
+                <asvg:svgBlip xmlns:asvg="http://schemas.microsoft.com/office/drawing/2016/SVG/main" r:embed="rId8"/>
               </a:ext>
             </a:extLst>
           </a:blip>
@@ -4856,7 +4856,7 @@
         </p:blipFill>
         <p:spPr>
           <a:xfrm>
-            <a:off x="2679546" y="4408099"/>
+            <a:off x="2679546" y="3520931"/>
             <a:ext cx="300780" cy="300780"/>
           </a:xfrm>
           <a:prstGeom prst="rect">
@@ -4878,7 +4878,7 @@
         </p:nvSpPr>
         <p:spPr>
           <a:xfrm rot="19800000">
-            <a:off x="-1419236" y="4280935"/>
+            <a:off x="-1419236" y="3404787"/>
             <a:ext cx="7675127" cy="7675127"/>
           </a:xfrm>
           <a:prstGeom prst="arc">
@@ -4929,7 +4929,7 @@
         </p:nvSpPr>
         <p:spPr>
           <a:xfrm>
-            <a:off x="982382" y="5231386"/>
+            <a:off x="982382" y="4338076"/>
             <a:ext cx="446678" cy="446678"/>
           </a:xfrm>
           <a:prstGeom prst="ellipse">
@@ -4979,10 +4979,10 @@
           <p:nvPr/>
         </p:nvPicPr>
         <p:blipFill>
-          <a:blip r:embed="rId2">
+          <a:blip>
             <a:extLst>
               <a:ext uri="{96DAC541-7B7A-43D3-8B79-37D633B846F1}">
-                <asvg:svgBlip xmlns:asvg="http://schemas.microsoft.com/office/drawing/2016/SVG/main" r:embed="rId3"/>
+                <asvg:svgBlip xmlns:asvg="http://schemas.microsoft.com/office/drawing/2016/SVG/main" r:embed="rId2"/>
               </a:ext>
             </a:extLst>
           </a:blip>
@@ -4992,7 +4992,7 @@
         </p:blipFill>
         <p:spPr>
           <a:xfrm>
-            <a:off x="1010267" y="5268682"/>
+            <a:off x="1010267" y="4375372"/>
             <a:ext cx="386005" cy="386005"/>
           </a:xfrm>
           <a:prstGeom prst="rect">
@@ -5014,7 +5014,7 @@
         </p:nvSpPr>
         <p:spPr>
           <a:xfrm>
-            <a:off x="862500" y="5644185"/>
+            <a:off x="862500" y="4750875"/>
             <a:ext cx="671979" cy="215444"/>
           </a:xfrm>
           <a:prstGeom prst="rect">
@@ -5052,7 +5052,7 @@
         </p:nvSpPr>
         <p:spPr>
           <a:xfrm>
-            <a:off x="2199600" y="5231386"/>
+            <a:off x="2199600" y="4338076"/>
             <a:ext cx="446678" cy="446678"/>
           </a:xfrm>
           <a:prstGeom prst="ellipse">
@@ -5101,7 +5101,7 @@
         </p:nvSpPr>
         <p:spPr>
           <a:xfrm>
-            <a:off x="2084030" y="5658830"/>
+            <a:off x="2084030" y="4765520"/>
             <a:ext cx="697038" cy="292965"/>
           </a:xfrm>
           <a:prstGeom prst="rect">
@@ -5144,7 +5144,7 @@
         </p:nvSpPr>
         <p:spPr>
           <a:xfrm>
-            <a:off x="3412800" y="5231386"/>
+            <a:off x="3412800" y="4338076"/>
             <a:ext cx="446678" cy="446678"/>
           </a:xfrm>
           <a:prstGeom prst="ellipse">
@@ -5195,10 +5195,10 @@
           <p:nvPr/>
         </p:nvPicPr>
         <p:blipFill>
-          <a:blip r:embed="rId4">
+          <a:blip>
             <a:extLst>
               <a:ext uri="{96DAC541-7B7A-43D3-8B79-37D633B846F1}">
-                <asvg:svgBlip xmlns:asvg="http://schemas.microsoft.com/office/drawing/2016/SVG/main" r:embed="rId8"/>
+                <asvg:svgBlip xmlns:asvg="http://schemas.microsoft.com/office/drawing/2016/SVG/main" r:embed="rId5"/>
               </a:ext>
             </a:extLst>
           </a:blip>
@@ -5208,7 +5208,7 @@
         </p:blipFill>
         <p:spPr>
           <a:xfrm>
-            <a:off x="3494016" y="5304835"/>
+            <a:off x="3494016" y="4411525"/>
             <a:ext cx="299779" cy="299779"/>
           </a:xfrm>
           <a:prstGeom prst="rect">
@@ -5230,7 +5230,7 @@
         </p:nvSpPr>
         <p:spPr>
           <a:xfrm>
-            <a:off x="3325709" y="5637118"/>
+            <a:off x="3325709" y="4743808"/>
             <a:ext cx="623889" cy="215444"/>
           </a:xfrm>
           <a:prstGeom prst="rect">
@@ -5269,10 +5269,10 @@
           <p:nvPr/>
         </p:nvPicPr>
         <p:blipFill>
-          <a:blip r:embed="rId15">
+          <a:blip>
             <a:extLst>
               <a:ext uri="{96DAC541-7B7A-43D3-8B79-37D633B846F1}">
-                <asvg:svgBlip xmlns:asvg="http://schemas.microsoft.com/office/drawing/2016/SVG/main" r:embed="rId16"/>
+                <asvg:svgBlip xmlns:asvg="http://schemas.microsoft.com/office/drawing/2016/SVG/main" r:embed="rId9"/>
               </a:ext>
             </a:extLst>
           </a:blip>
@@ -5282,7 +5282,7 @@
         </p:blipFill>
         <p:spPr>
           <a:xfrm>
-            <a:off x="2250300" y="5286495"/>
+            <a:off x="2250300" y="4393185"/>
             <a:ext cx="350377" cy="350377"/>
           </a:xfrm>
           <a:prstGeom prst="rect">
@@ -5439,7 +5439,7 @@
         </p:nvCxnSpPr>
         <p:spPr>
           <a:xfrm>
-            <a:off x="1428925" y="3671365"/>
+            <a:off x="1428925" y="5457661"/>
             <a:ext cx="363457" cy="0"/>
           </a:xfrm>
           <a:prstGeom prst="line">
@@ -5483,7 +5483,7 @@
         </p:nvCxnSpPr>
         <p:spPr>
           <a:xfrm>
-            <a:off x="1429060" y="4563045"/>
+            <a:off x="1429060" y="3675877"/>
             <a:ext cx="363322" cy="0"/>
           </a:xfrm>
           <a:prstGeom prst="line">
@@ -5527,7 +5527,7 @@
         </p:nvCxnSpPr>
         <p:spPr>
           <a:xfrm>
-            <a:off x="2239060" y="4563045"/>
+            <a:off x="2239060" y="3675877"/>
             <a:ext cx="363322" cy="0"/>
           </a:xfrm>
           <a:prstGeom prst="line">
@@ -5571,7 +5571,7 @@
         </p:nvCxnSpPr>
         <p:spPr>
           <a:xfrm>
-            <a:off x="3049060" y="4563045"/>
+            <a:off x="3049060" y="3675877"/>
             <a:ext cx="363322" cy="0"/>
           </a:xfrm>
           <a:prstGeom prst="line">
@@ -5615,7 +5615,7 @@
         </p:nvCxnSpPr>
         <p:spPr>
           <a:xfrm>
-            <a:off x="1429060" y="5454725"/>
+            <a:off x="1429060" y="4561415"/>
             <a:ext cx="770540" cy="0"/>
           </a:xfrm>
           <a:prstGeom prst="line">
@@ -5659,7 +5659,7 @@
         </p:nvCxnSpPr>
         <p:spPr>
           <a:xfrm>
-            <a:off x="2646278" y="5454725"/>
+            <a:off x="2646278" y="4561415"/>
             <a:ext cx="766522" cy="0"/>
           </a:xfrm>
           <a:prstGeom prst="line">
@@ -5703,7 +5703,7 @@
         </p:nvCxnSpPr>
         <p:spPr>
           <a:xfrm>
-            <a:off x="2239060" y="3671365"/>
+            <a:off x="2239060" y="5457661"/>
             <a:ext cx="363322" cy="0"/>
           </a:xfrm>
           <a:prstGeom prst="line">
@@ -5747,7 +5747,7 @@
         </p:nvCxnSpPr>
         <p:spPr>
           <a:xfrm>
-            <a:off x="3049060" y="3671365"/>
+            <a:off x="3049060" y="5457661"/>
             <a:ext cx="363740" cy="0"/>
           </a:xfrm>
           <a:prstGeom prst="line">
@@ -5874,10 +5874,10 @@
           <p:nvPr/>
         </p:nvPicPr>
         <p:blipFill>
-          <a:blip r:embed="rId17">
+          <a:blip>
             <a:extLst>
               <a:ext uri="{96DAC541-7B7A-43D3-8B79-37D633B846F1}">
-                <asvg:svgBlip xmlns:asvg="http://schemas.microsoft.com/office/drawing/2016/SVG/main" r:embed="rId18"/>
+                <asvg:svgBlip xmlns:asvg="http://schemas.microsoft.com/office/drawing/2016/SVG/main" r:embed="rId10"/>
               </a:ext>
             </a:extLst>
           </a:blip>
@@ -5887,7 +5887,7 @@
         </p:blipFill>
         <p:spPr>
           <a:xfrm>
-            <a:off x="1846584" y="4438773"/>
+            <a:off x="1846584" y="3551605"/>
             <a:ext cx="358590" cy="358590"/>
           </a:xfrm>
           <a:prstGeom prst="rect">
@@ -5910,10 +5910,10 @@
           <p:nvPr/>
         </p:nvPicPr>
         <p:blipFill>
-          <a:blip r:embed="rId17">
+          <a:blip>
             <a:extLst>
               <a:ext uri="{96DAC541-7B7A-43D3-8B79-37D633B846F1}">
-                <asvg:svgBlip xmlns:asvg="http://schemas.microsoft.com/office/drawing/2016/SVG/main" r:embed="rId18"/>
+                <asvg:svgBlip xmlns:asvg="http://schemas.microsoft.com/office/drawing/2016/SVG/main" r:embed="rId10"/>
               </a:ext>
             </a:extLst>
           </a:blip>
@@ -5923,7 +5923,7 @@
         </p:blipFill>
         <p:spPr>
           <a:xfrm>
-            <a:off x="2654628" y="3552366"/>
+            <a:off x="2654628" y="5338662"/>
             <a:ext cx="358590" cy="358590"/>
           </a:xfrm>
           <a:prstGeom prst="rect">
@@ -5946,10 +5946,10 @@
           <p:nvPr/>
         </p:nvPicPr>
         <p:blipFill>
-          <a:blip r:embed="rId17">
+          <a:blip>
             <a:extLst>
               <a:ext uri="{96DAC541-7B7A-43D3-8B79-37D633B846F1}">
-                <asvg:svgBlip xmlns:asvg="http://schemas.microsoft.com/office/drawing/2016/SVG/main" r:embed="rId18"/>
+                <asvg:svgBlip xmlns:asvg="http://schemas.microsoft.com/office/drawing/2016/SVG/main" r:embed="rId10"/>
               </a:ext>
             </a:extLst>
           </a:blip>
@@ -5982,10 +5982,10 @@
           <p:nvPr/>
         </p:nvPicPr>
         <p:blipFill>
-          <a:blip r:embed="rId17">
+          <a:blip>
             <a:extLst>
               <a:ext uri="{96DAC541-7B7A-43D3-8B79-37D633B846F1}">
-                <asvg:svgBlip xmlns:asvg="http://schemas.microsoft.com/office/drawing/2016/SVG/main" r:embed="rId18"/>
+                <asvg:svgBlip xmlns:asvg="http://schemas.microsoft.com/office/drawing/2016/SVG/main" r:embed="rId10"/>
               </a:ext>
             </a:extLst>
           </a:blip>
@@ -6018,10 +6018,10 @@
           <p:nvPr/>
         </p:nvPicPr>
         <p:blipFill>
-          <a:blip r:embed="rId19">
+          <a:blip>
             <a:extLst>
               <a:ext uri="{96DAC541-7B7A-43D3-8B79-37D633B846F1}">
-                <asvg:svgBlip xmlns:asvg="http://schemas.microsoft.com/office/drawing/2016/SVG/main" r:embed="rId20"/>
+                <asvg:svgBlip xmlns:asvg="http://schemas.microsoft.com/office/drawing/2016/SVG/main" r:embed="rId11"/>
               </a:ext>
             </a:extLst>
           </a:blip>
@@ -6031,7 +6031,7 @@
         </p:blipFill>
         <p:spPr>
           <a:xfrm>
-            <a:off x="1969571" y="4397062"/>
+            <a:off x="1969571" y="3509894"/>
             <a:ext cx="161427" cy="161427"/>
           </a:xfrm>
           <a:prstGeom prst="rect">
@@ -6054,10 +6054,10 @@
           <p:nvPr/>
         </p:nvPicPr>
         <p:blipFill>
-          <a:blip r:embed="rId21">
+          <a:blip>
             <a:extLst>
               <a:ext uri="{96DAC541-7B7A-43D3-8B79-37D633B846F1}">
-                <asvg:svgBlip xmlns:asvg="http://schemas.microsoft.com/office/drawing/2016/SVG/main" r:embed="rId22"/>
+                <asvg:svgBlip xmlns:asvg="http://schemas.microsoft.com/office/drawing/2016/SVG/main" r:embed="rId12"/>
               </a:ext>
             </a:extLst>
           </a:blip>
@@ -6067,7 +6067,7 @@
         </p:blipFill>
         <p:spPr>
           <a:xfrm>
-            <a:off x="2792600" y="3500051"/>
+            <a:off x="2792600" y="5286347"/>
             <a:ext cx="175653" cy="175653"/>
           </a:xfrm>
           <a:prstGeom prst="rect">
@@ -6090,10 +6090,10 @@
           <p:nvPr/>
         </p:nvPicPr>
         <p:blipFill>
-          <a:blip r:embed="rId21">
+          <a:blip>
             <a:extLst>
               <a:ext uri="{96DAC541-7B7A-43D3-8B79-37D633B846F1}">
-                <asvg:svgBlip xmlns:asvg="http://schemas.microsoft.com/office/drawing/2016/SVG/main" r:embed="rId22"/>
+                <asvg:svgBlip xmlns:asvg="http://schemas.microsoft.com/office/drawing/2016/SVG/main" r:embed="rId12"/>
               </a:ext>
             </a:extLst>
           </a:blip>
@@ -6126,10 +6126,10 @@
           <p:nvPr/>
         </p:nvPicPr>
         <p:blipFill>
-          <a:blip r:embed="rId23">
+          <a:blip>
             <a:extLst>
               <a:ext uri="{96DAC541-7B7A-43D3-8B79-37D633B846F1}">
-                <asvg:svgBlip xmlns:asvg="http://schemas.microsoft.com/office/drawing/2016/SVG/main" r:embed="rId24"/>
+                <asvg:svgBlip xmlns:asvg="http://schemas.microsoft.com/office/drawing/2016/SVG/main" r:embed="rId13"/>
               </a:ext>
             </a:extLst>
           </a:blip>
@@ -6162,10 +6162,10 @@
           <p:nvPr/>
         </p:nvPicPr>
         <p:blipFill>
-          <a:blip r:embed="rId25">
+          <a:blip>
             <a:extLst>
               <a:ext uri="{96DAC541-7B7A-43D3-8B79-37D633B846F1}">
-                <asvg:svgBlip xmlns:asvg="http://schemas.microsoft.com/office/drawing/2016/SVG/main" r:embed="rId26"/>
+                <asvg:svgBlip xmlns:asvg="http://schemas.microsoft.com/office/drawing/2016/SVG/main" r:embed="rId14"/>
               </a:ext>
             </a:extLst>
           </a:blip>
@@ -6537,10 +6537,10 @@
           <p:nvPr/>
         </p:nvPicPr>
         <p:blipFill>
-          <a:blip r:embed="rId4">
+          <a:blip>
             <a:extLst>
               <a:ext uri="{96DAC541-7B7A-43D3-8B79-37D633B846F1}">
-                <asvg:svgBlip xmlns:asvg="http://schemas.microsoft.com/office/drawing/2016/SVG/main" r:embed="rId8"/>
+                <asvg:svgBlip xmlns:asvg="http://schemas.microsoft.com/office/drawing/2016/SVG/main" r:embed="rId5"/>
               </a:ext>
             </a:extLst>
           </a:blip>
@@ -6780,10 +6780,10 @@
           <p:nvPr/>
         </p:nvPicPr>
         <p:blipFill>
-          <a:blip r:embed="rId15">
+          <a:blip>
             <a:extLst>
               <a:ext uri="{96DAC541-7B7A-43D3-8B79-37D633B846F1}">
-                <asvg:svgBlip xmlns:asvg="http://schemas.microsoft.com/office/drawing/2016/SVG/main" r:embed="rId16"/>
+                <asvg:svgBlip xmlns:asvg="http://schemas.microsoft.com/office/drawing/2016/SVG/main" r:embed="rId9"/>
               </a:ext>
             </a:extLst>
           </a:blip>
@@ -6854,10 +6854,10 @@
           <p:nvPr/>
         </p:nvPicPr>
         <p:blipFill>
-          <a:blip r:embed="rId27">
+          <a:blip>
             <a:extLst>
               <a:ext uri="{96DAC541-7B7A-43D3-8B79-37D633B846F1}">
-                <asvg:svgBlip xmlns:asvg="http://schemas.microsoft.com/office/drawing/2016/SVG/main" r:embed="rId28"/>
+                <asvg:svgBlip xmlns:asvg="http://schemas.microsoft.com/office/drawing/2016/SVG/main" r:embed="rId15"/>
               </a:ext>
             </a:extLst>
           </a:blip>
@@ -7028,10 +7028,10 @@
           <p:nvPr/>
         </p:nvPicPr>
         <p:blipFill>
-          <a:blip r:embed="rId29">
+          <a:blip>
             <a:extLst>
               <a:ext uri="{96DAC541-7B7A-43D3-8B79-37D633B846F1}">
-                <asvg:svgBlip xmlns:asvg="http://schemas.microsoft.com/office/drawing/2016/SVG/main" r:embed="rId30"/>
+                <asvg:svgBlip xmlns:asvg="http://schemas.microsoft.com/office/drawing/2016/SVG/main" r:embed="rId16"/>
               </a:ext>
             </a:extLst>
           </a:blip>
@@ -7206,10 +7206,10 @@
           <p:nvPr/>
         </p:nvPicPr>
         <p:blipFill>
-          <a:blip r:embed="rId4">
+          <a:blip>
             <a:extLst>
               <a:ext uri="{96DAC541-7B7A-43D3-8B79-37D633B846F1}">
-                <asvg:svgBlip xmlns:asvg="http://schemas.microsoft.com/office/drawing/2016/SVG/main" r:embed="rId8"/>
+                <asvg:svgBlip xmlns:asvg="http://schemas.microsoft.com/office/drawing/2016/SVG/main" r:embed="rId5"/>
               </a:ext>
             </a:extLst>
           </a:blip>
@@ -7404,10 +7404,10 @@
           <p:nvPr/>
         </p:nvPicPr>
         <p:blipFill>
-          <a:blip r:embed="rId27">
+          <a:blip>
             <a:extLst>
               <a:ext uri="{96DAC541-7B7A-43D3-8B79-37D633B846F1}">
-                <asvg:svgBlip xmlns:asvg="http://schemas.microsoft.com/office/drawing/2016/SVG/main" r:embed="rId28"/>
+                <asvg:svgBlip xmlns:asvg="http://schemas.microsoft.com/office/drawing/2016/SVG/main" r:embed="rId15"/>
               </a:ext>
             </a:extLst>
           </a:blip>
@@ -7749,10 +7749,10 @@
           <p:nvPr/>
         </p:nvPicPr>
         <p:blipFill>
-          <a:blip r:embed="rId4">
+          <a:blip>
             <a:extLst>
               <a:ext uri="{96DAC541-7B7A-43D3-8B79-37D633B846F1}">
-                <asvg:svgBlip xmlns:asvg="http://schemas.microsoft.com/office/drawing/2016/SVG/main" r:embed="rId8"/>
+                <asvg:svgBlip xmlns:asvg="http://schemas.microsoft.com/office/drawing/2016/SVG/main" r:embed="rId5"/>
               </a:ext>
             </a:extLst>
           </a:blip>
@@ -8143,10 +8143,10 @@
           <p:nvPr/>
         </p:nvPicPr>
         <p:blipFill>
-          <a:blip r:embed="rId4">
+          <a:blip>
             <a:extLst>
               <a:ext uri="{96DAC541-7B7A-43D3-8B79-37D633B846F1}">
-                <asvg:svgBlip xmlns:asvg="http://schemas.microsoft.com/office/drawing/2016/SVG/main" r:embed="rId8"/>
+                <asvg:svgBlip xmlns:asvg="http://schemas.microsoft.com/office/drawing/2016/SVG/main" r:embed="rId5"/>
               </a:ext>
             </a:extLst>
           </a:blip>
@@ -8531,10 +8531,10 @@
           <p:nvPr/>
         </p:nvPicPr>
         <p:blipFill>
-          <a:blip r:embed="rId4">
+          <a:blip>
             <a:extLst>
               <a:ext uri="{96DAC541-7B7A-43D3-8B79-37D633B846F1}">
-                <asvg:svgBlip xmlns:asvg="http://schemas.microsoft.com/office/drawing/2016/SVG/main" r:embed="rId8"/>
+                <asvg:svgBlip xmlns:asvg="http://schemas.microsoft.com/office/drawing/2016/SVG/main" r:embed="rId5"/>
               </a:ext>
             </a:extLst>
           </a:blip>
@@ -8836,10 +8836,10 @@
           <p:nvPr/>
         </p:nvPicPr>
         <p:blipFill>
-          <a:blip r:embed="rId31">
+          <a:blip>
             <a:extLst>
               <a:ext uri="{96DAC541-7B7A-43D3-8B79-37D633B846F1}">
-                <asvg:svgBlip xmlns:asvg="http://schemas.microsoft.com/office/drawing/2016/SVG/main" r:embed="rId32"/>
+                <asvg:svgBlip xmlns:asvg="http://schemas.microsoft.com/office/drawing/2016/SVG/main" r:embed="rId17"/>
               </a:ext>
             </a:extLst>
           </a:blip>
@@ -8872,10 +8872,10 @@
           <p:nvPr/>
         </p:nvPicPr>
         <p:blipFill>
-          <a:blip r:embed="rId33">
+          <a:blip>
             <a:extLst>
               <a:ext uri="{96DAC541-7B7A-43D3-8B79-37D633B846F1}">
-                <asvg:svgBlip xmlns:asvg="http://schemas.microsoft.com/office/drawing/2016/SVG/main" r:embed="rId34"/>
+                <asvg:svgBlip xmlns:asvg="http://schemas.microsoft.com/office/drawing/2016/SVG/main" r:embed="rId18"/>
               </a:ext>
             </a:extLst>
           </a:blip>
@@ -8908,10 +8908,10 @@
           <p:nvPr/>
         </p:nvPicPr>
         <p:blipFill>
-          <a:blip r:embed="rId35">
+          <a:blip>
             <a:extLst>
               <a:ext uri="{96DAC541-7B7A-43D3-8B79-37D633B846F1}">
-                <asvg:svgBlip xmlns:asvg="http://schemas.microsoft.com/office/drawing/2016/SVG/main" r:embed="rId36"/>
+                <asvg:svgBlip xmlns:asvg="http://schemas.microsoft.com/office/drawing/2016/SVG/main" r:embed="rId19"/>
               </a:ext>
             </a:extLst>
           </a:blip>
@@ -8944,10 +8944,10 @@
           <p:nvPr/>
         </p:nvPicPr>
         <p:blipFill>
-          <a:blip r:embed="rId37">
+          <a:blip>
             <a:extLst>
               <a:ext uri="{96DAC541-7B7A-43D3-8B79-37D633B846F1}">
-                <asvg:svgBlip xmlns:asvg="http://schemas.microsoft.com/office/drawing/2016/SVG/main" r:embed="rId38"/>
+                <asvg:svgBlip xmlns:asvg="http://schemas.microsoft.com/office/drawing/2016/SVG/main" r:embed="rId20"/>
               </a:ext>
             </a:extLst>
           </a:blip>

--- a/img/models/models.pptx
+++ b/img/models/models.pptx
@@ -254,7 +254,7 @@
           <a:p>
             <a:fld id="{19729664-E51F-9D43-AC1D-89266E3D84E7}" type="datetimeFigureOut">
               <a:rPr lang="en-US" smtClean="0"/>
-              <a:t>3/12/26</a:t>
+              <a:t>7/9/26</a:t>
             </a:fld>
             <a:endParaRPr lang="en-US"/>
           </a:p>
@@ -424,7 +424,7 @@
           <a:p>
             <a:fld id="{19729664-E51F-9D43-AC1D-89266E3D84E7}" type="datetimeFigureOut">
               <a:rPr lang="en-US" smtClean="0"/>
-              <a:t>3/12/26</a:t>
+              <a:t>7/9/26</a:t>
             </a:fld>
             <a:endParaRPr lang="en-US"/>
           </a:p>
@@ -604,7 +604,7 @@
           <a:p>
             <a:fld id="{19729664-E51F-9D43-AC1D-89266E3D84E7}" type="datetimeFigureOut">
               <a:rPr lang="en-US" smtClean="0"/>
-              <a:t>3/12/26</a:t>
+              <a:t>7/9/26</a:t>
             </a:fld>
             <a:endParaRPr lang="en-US"/>
           </a:p>
@@ -774,7 +774,7 @@
           <a:p>
             <a:fld id="{19729664-E51F-9D43-AC1D-89266E3D84E7}" type="datetimeFigureOut">
               <a:rPr lang="en-US" smtClean="0"/>
-              <a:t>3/12/26</a:t>
+              <a:t>7/9/26</a:t>
             </a:fld>
             <a:endParaRPr lang="en-US"/>
           </a:p>
@@ -1020,7 +1020,7 @@
           <a:p>
             <a:fld id="{19729664-E51F-9D43-AC1D-89266E3D84E7}" type="datetimeFigureOut">
               <a:rPr lang="en-US" smtClean="0"/>
-              <a:t>3/12/26</a:t>
+              <a:t>7/9/26</a:t>
             </a:fld>
             <a:endParaRPr lang="en-US"/>
           </a:p>
@@ -1252,7 +1252,7 @@
           <a:p>
             <a:fld id="{19729664-E51F-9D43-AC1D-89266E3D84E7}" type="datetimeFigureOut">
               <a:rPr lang="en-US" smtClean="0"/>
-              <a:t>3/12/26</a:t>
+              <a:t>7/9/26</a:t>
             </a:fld>
             <a:endParaRPr lang="en-US"/>
           </a:p>
@@ -1619,7 +1619,7 @@
           <a:p>
             <a:fld id="{19729664-E51F-9D43-AC1D-89266E3D84E7}" type="datetimeFigureOut">
               <a:rPr lang="en-US" smtClean="0"/>
-              <a:t>3/12/26</a:t>
+              <a:t>7/9/26</a:t>
             </a:fld>
             <a:endParaRPr lang="en-US"/>
           </a:p>
@@ -1737,7 +1737,7 @@
           <a:p>
             <a:fld id="{19729664-E51F-9D43-AC1D-89266E3D84E7}" type="datetimeFigureOut">
               <a:rPr lang="en-US" smtClean="0"/>
-              <a:t>3/12/26</a:t>
+              <a:t>7/9/26</a:t>
             </a:fld>
             <a:endParaRPr lang="en-US"/>
           </a:p>
@@ -1832,7 +1832,7 @@
           <a:p>
             <a:fld id="{19729664-E51F-9D43-AC1D-89266E3D84E7}" type="datetimeFigureOut">
               <a:rPr lang="en-US" smtClean="0"/>
-              <a:t>3/12/26</a:t>
+              <a:t>7/9/26</a:t>
             </a:fld>
             <a:endParaRPr lang="en-US"/>
           </a:p>
@@ -2109,7 +2109,7 @@
           <a:p>
             <a:fld id="{19729664-E51F-9D43-AC1D-89266E3D84E7}" type="datetimeFigureOut">
               <a:rPr lang="en-US" smtClean="0"/>
-              <a:t>3/12/26</a:t>
+              <a:t>7/9/26</a:t>
             </a:fld>
             <a:endParaRPr lang="en-US"/>
           </a:p>
@@ -2366,7 +2366,7 @@
           <a:p>
             <a:fld id="{19729664-E51F-9D43-AC1D-89266E3D84E7}" type="datetimeFigureOut">
               <a:rPr lang="en-US" smtClean="0"/>
-              <a:t>3/12/26</a:t>
+              <a:t>7/9/26</a:t>
             </a:fld>
             <a:endParaRPr lang="en-US"/>
           </a:p>
@@ -2579,7 +2579,7 @@
           <a:p>
             <a:fld id="{19729664-E51F-9D43-AC1D-89266E3D84E7}" type="datetimeFigureOut">
               <a:rPr lang="en-US" smtClean="0"/>
-              <a:t>3/12/26</a:t>
+              <a:t>7/9/26</a:t>
             </a:fld>
             <a:endParaRPr lang="en-US"/>
           </a:p>
@@ -4866,57 +4866,6 @@
       </p:pic>
       <p:sp>
         <p:nvSpPr>
-          <p:cNvPr id="117" name="Arc 116">
-            <a:extLst>
-              <a:ext uri="{FF2B5EF4-FFF2-40B4-BE49-F238E27FC236}">
-                <a16:creationId xmlns:a16="http://schemas.microsoft.com/office/drawing/2014/main" id="{5E83C1E1-1881-D27D-BFC0-7B57D9F7DD6C}"/>
-              </a:ext>
-            </a:extLst>
-          </p:cNvPr>
-          <p:cNvSpPr/>
-          <p:nvPr/>
-        </p:nvSpPr>
-        <p:spPr>
-          <a:xfrm rot="19800000">
-            <a:off x="-1419236" y="3404787"/>
-            <a:ext cx="7675127" cy="7675127"/>
-          </a:xfrm>
-          <a:prstGeom prst="arc">
-            <a:avLst>
-              <a:gd name="adj1" fmla="val 17064465"/>
-              <a:gd name="adj2" fmla="val 18938180"/>
-            </a:avLst>
-          </a:prstGeom>
-          <a:ln w="19050">
-            <a:headEnd type="none" w="med" len="med"/>
-            <a:tailEnd type="stealth" w="lg" len="lg"/>
-          </a:ln>
-        </p:spPr>
-        <p:style>
-          <a:lnRef idx="2">
-            <a:schemeClr val="dk1"/>
-          </a:lnRef>
-          <a:fillRef idx="0">
-            <a:schemeClr val="dk1"/>
-          </a:fillRef>
-          <a:effectRef idx="1">
-            <a:schemeClr val="dk1"/>
-          </a:effectRef>
-          <a:fontRef idx="minor">
-            <a:schemeClr val="tx1"/>
-          </a:fontRef>
-        </p:style>
-        <p:txBody>
-          <a:bodyPr rtlCol="0" anchor="ctr"/>
-          <a:lstStyle/>
-          <a:p>
-            <a:pPr algn="ctr"/>
-            <a:endParaRPr lang="en-US"/>
-          </a:p>
-        </p:txBody>
-      </p:sp>
-      <p:sp>
-        <p:nvSpPr>
           <p:cNvPr id="118" name="Oval 117">
             <a:extLst>
               <a:ext uri="{FF2B5EF4-FFF2-40B4-BE49-F238E27FC236}">
@@ -6875,57 +6824,6 @@
           </a:prstGeom>
         </p:spPr>
       </p:pic>
-      <p:sp>
-        <p:nvSpPr>
-          <p:cNvPr id="193" name="Arc 192">
-            <a:extLst>
-              <a:ext uri="{FF2B5EF4-FFF2-40B4-BE49-F238E27FC236}">
-                <a16:creationId xmlns:a16="http://schemas.microsoft.com/office/drawing/2014/main" id="{F0A1933F-C073-9E7F-4D77-189732CDF994}"/>
-              </a:ext>
-            </a:extLst>
-          </p:cNvPr>
-          <p:cNvSpPr/>
-          <p:nvPr/>
-        </p:nvSpPr>
-        <p:spPr>
-          <a:xfrm rot="1800000" flipH="1">
-            <a:off x="4334492" y="864474"/>
-            <a:ext cx="2985064" cy="2985064"/>
-          </a:xfrm>
-          <a:prstGeom prst="arc">
-            <a:avLst>
-              <a:gd name="adj1" fmla="val 16490877"/>
-              <a:gd name="adj2" fmla="val 19569654"/>
-            </a:avLst>
-          </a:prstGeom>
-          <a:ln w="19050">
-            <a:headEnd type="none" w="med" len="med"/>
-            <a:tailEnd type="stealth" w="lg" len="lg"/>
-          </a:ln>
-        </p:spPr>
-        <p:style>
-          <a:lnRef idx="2">
-            <a:schemeClr val="dk1"/>
-          </a:lnRef>
-          <a:fillRef idx="0">
-            <a:schemeClr val="dk1"/>
-          </a:fillRef>
-          <a:effectRef idx="1">
-            <a:schemeClr val="dk1"/>
-          </a:effectRef>
-          <a:fontRef idx="minor">
-            <a:schemeClr val="tx1"/>
-          </a:fontRef>
-        </p:style>
-        <p:txBody>
-          <a:bodyPr rtlCol="0" anchor="ctr"/>
-          <a:lstStyle/>
-          <a:p>
-            <a:pPr algn="ctr"/>
-            <a:endParaRPr lang="en-US"/>
-          </a:p>
-        </p:txBody>
-      </p:sp>
       <p:sp>
         <p:nvSpPr>
           <p:cNvPr id="195" name="Oval 194">
@@ -8965,6 +8863,57 @@
           </a:prstGeom>
         </p:spPr>
       </p:pic>
+      <p:sp>
+        <p:nvSpPr>
+          <p:cNvPr id="2" name="Arc 1">
+            <a:extLst>
+              <a:ext uri="{FF2B5EF4-FFF2-40B4-BE49-F238E27FC236}">
+                <a16:creationId xmlns:a16="http://schemas.microsoft.com/office/drawing/2014/main" id="{F426C1DD-5EDD-190E-A20D-2405E11EAB23}"/>
+              </a:ext>
+            </a:extLst>
+          </p:cNvPr>
+          <p:cNvSpPr/>
+          <p:nvPr/>
+        </p:nvSpPr>
+        <p:spPr>
+          <a:xfrm rot="1800000" flipH="1">
+            <a:off x="4775586" y="1009931"/>
+            <a:ext cx="1264231" cy="1264231"/>
+          </a:xfrm>
+          <a:prstGeom prst="arc">
+            <a:avLst>
+              <a:gd name="adj1" fmla="val 16835953"/>
+              <a:gd name="adj2" fmla="val 19190993"/>
+            </a:avLst>
+          </a:prstGeom>
+          <a:ln w="19050">
+            <a:headEnd type="none" w="lg" len="lg"/>
+            <a:tailEnd type="stealth" w="lg" len="lg"/>
+          </a:ln>
+        </p:spPr>
+        <p:style>
+          <a:lnRef idx="2">
+            <a:schemeClr val="dk1"/>
+          </a:lnRef>
+          <a:fillRef idx="0">
+            <a:schemeClr val="dk1"/>
+          </a:fillRef>
+          <a:effectRef idx="1">
+            <a:schemeClr val="dk1"/>
+          </a:effectRef>
+          <a:fontRef idx="minor">
+            <a:schemeClr val="tx1"/>
+          </a:fontRef>
+        </p:style>
+        <p:txBody>
+          <a:bodyPr rtlCol="0" anchor="ctr"/>
+          <a:lstStyle/>
+          <a:p>
+            <a:pPr algn="ctr"/>
+            <a:endParaRPr lang="en-US"/>
+          </a:p>
+        </p:txBody>
+      </p:sp>
     </p:spTree>
     <p:extLst>
       <p:ext uri="{BB962C8B-B14F-4D97-AF65-F5344CB8AC3E}">
